--- a/user_guides/suite_overview/AudioSuite-Pro_New_User_Presentation.pptx
+++ b/user_guides/suite_overview/AudioSuite-Pro_New_User_Presentation.pptx
@@ -9337,7 +9337,7 @@
                 </a:solidFill>
                 <a:latin typeface="Segoe UI"/>
               </a:rPr>
-              <a:t>File Reorganizer</a:t>
+              <a:t>Tag-Based File Reorganizer</a:t>
             </a:r>
           </a:p>
           <a:p>

--- a/user_guides/suite_overview/AudioSuite-Pro_New_User_Presentation.pptx
+++ b/user_guides/suite_overview/AudioSuite-Pro_New_User_Presentation.pptx
@@ -19475,7 +19475,7 @@
                 </a:solidFill>
                 <a:latin typeface="Segoe UI"/>
               </a:rPr>
-              <a:t>Three one-click presets (Mild / Moderate / Aggressive) or thirteen sliders for full manual control</a:t>
+              <a:t>Mild / Moderate / Aggressive presets, or Custom with thirteen sliders and five effects in a separate editor window</a:t>
             </a:r>
           </a:p>
           <a:p>

--- a/user_guides/suite_overview/AudioSuite-Pro_New_User_Presentation.pptx
+++ b/user_guides/suite_overview/AudioSuite-Pro_New_User_Presentation.pptx
@@ -16456,7 +16456,7 @@
                 </a:solidFill>
                 <a:latin typeface="Segoe UI"/>
               </a:rPr>
-              <a:t>All documentation ships inside the suite, under user_guides/</a:t>
+              <a:t>docs/index.md is the front door - guides, reference and the API</a:t>
             </a:r>
           </a:p>
         </p:txBody>
@@ -16529,7 +16529,7 @@
                 </a:solidFill>
                 <a:latin typeface="Segoe UI"/>
               </a:rPr>
-              <a:t>The AudioSuite-Pro Overview Guide - how the 26 tools relate, and which one to reach for (user_guides/suite_overview/)</a:t>
+              <a:t>The Suite Overview - how the 30 tools are grouped, and which one to reach for (docs/user/suite-overview.md)</a:t>
             </a:r>
           </a:p>
           <a:p>
@@ -16579,7 +16579,7 @@
                 </a:solidFill>
                 <a:latin typeface="Segoe UI"/>
               </a:rPr>
-              <a:t>The Technical User Guide - suite-wide error recovery and resource management</a:t>
+              <a:t>Retries, failure handling and cleanup - what happens when a file or a batch step fails (docs/resilience.md)</a:t>
             </a:r>
           </a:p>
           <a:p>
@@ -16604,7 +16604,7 @@
                 </a:solidFill>
                 <a:latin typeface="Segoe UI"/>
               </a:rPr>
-              <a:t>The Security Guide - API keys, credentials, and safe file handling</a:t>
+              <a:t>Security - API keys, credentials, and safe file handling (docs/user/security.md)</a:t>
             </a:r>
           </a:p>
           <a:p>
